--- a/classes/parte-7-red-team-y-operaciones-ofensivas/170-active-directory-enumeracion/clase-170-presentacion.pptx
+++ b/classes/parte-7-red-team-y-operaciones-ofensivas/170-active-directory-enumeracion/clase-170-presentacion.pptx
@@ -17,6 +17,9 @@
     <p:sldId id="265" r:id="rId16"/>
     <p:sldId id="266" r:id="rId17"/>
     <p:sldId id="267" r:id="rId18"/>
+    <p:sldId id="268" r:id="rId19"/>
+    <p:sldId id="269" r:id="rId20"/>
+    <p:sldId id="270" r:id="rId21"/>
   </p:sldIdLst>
   <p:sldSz cx="9144000" cy="6858000" type="screen4x3"/>
   <p:notesSz cx="6858000" cy="9144000"/>
@@ -3198,7 +3201,7 @@
                   <a:srgbClr val="0B3D2E"/>
                 </a:solidFill>
               </a:rPr>
-              <a:t>⚠️ Errores comunes</a:t>
+              <a:t>✍️ Ejercicios</a:t>
             </a:r>
           </a:p>
         </p:txBody>
@@ -3236,67 +3239,82 @@
                   <a:srgbClr val="22282E"/>
                 </a:solidFill>
               </a:rPr>
-              <a:t>•  LDAP no responde — DNS mal configurado o credenciales inválidas; verifica dominio y cuenta</a:t>
-            </a:r>
-          </a:p>
-          <a:p>
-            <a:pPr>
-              <a:spcAft>
-                <a:spcPts val="600"/>
-              </a:spcAft>
-            </a:pPr>
-            <a:r>
-              <a:rPr sz="1500">
-                <a:solidFill>
-                  <a:srgbClr val="22282E"/>
-                </a:solidFill>
-              </a:rPr>
-              <a:t>•  PowerView bloqueado por AMSI — Import detectado; aplica lo visto en la Clase 169 en el lab</a:t>
-            </a:r>
-          </a:p>
-          <a:p>
-            <a:pPr>
-              <a:spcAft>
-                <a:spcPts val="600"/>
-              </a:spcAft>
-            </a:pPr>
-            <a:r>
-              <a:rPr sz="1500">
-                <a:solidFill>
-                  <a:srgbClr val="22282E"/>
-                </a:solidFill>
-              </a:rPr>
-              <a:t>•  No aparecen SPNs — No hay cuentas de servicio con SPN registrado; revisa el diseño del lab</a:t>
-            </a:r>
-          </a:p>
-          <a:p>
-            <a:pPr>
-              <a:spcAft>
-                <a:spcPts val="600"/>
-              </a:spcAft>
-            </a:pPr>
-            <a:r>
-              <a:rPr sz="1500">
-                <a:solidFill>
-                  <a:srgbClr val="22282E"/>
-                </a:solidFill>
-              </a:rPr>
-              <a:t>•  Enumeración muy ruidosa — Consultas masivas; usa peticiones dirigidas y espaciadas</a:t>
-            </a:r>
-          </a:p>
-          <a:p>
-            <a:pPr>
-              <a:spcAft>
-                <a:spcPts val="600"/>
-              </a:spcAft>
-            </a:pPr>
-            <a:r>
-              <a:rPr sz="1500">
-                <a:solidFill>
-                  <a:srgbClr val="22282E"/>
-                </a:solidFill>
-              </a:rPr>
-              <a:t>•  El collector falla — Falta conectividad al DC o permisos; ejecuta con la cuenta correcta</a:t>
+              <a:t>•  Lista todos los miembros de "Domain Admins" del lab con dos herramientas distintas.</a:t>
+            </a:r>
+          </a:p>
+          <a:p>
+            <a:pPr>
+              <a:spcAft>
+                <a:spcPts val="600"/>
+              </a:spcAft>
+            </a:pPr>
+            <a:r>
+              <a:rPr sz="1500">
+                <a:solidFill>
+                  <a:srgbClr val="22282E"/>
+                </a:solidFill>
+              </a:rPr>
+              <a:t>•  Encuentra 3 cuentas con SPN y explica por qué son interesantes.</a:t>
+            </a:r>
+          </a:p>
+          <a:p>
+            <a:pPr>
+              <a:spcAft>
+                <a:spcPts val="600"/>
+              </a:spcAft>
+            </a:pPr>
+            <a:r>
+              <a:rPr sz="1500">
+                <a:solidFill>
+                  <a:srgbClr val="22282E"/>
+                </a:solidFill>
+              </a:rPr>
+              <a:t>•  Consulta por LDAP los usuarios con PASSWDNOTREQD o DONTREQUIREPREAUTH.</a:t>
+            </a:r>
+          </a:p>
+          <a:p>
+            <a:pPr>
+              <a:spcAft>
+                <a:spcPts val="600"/>
+              </a:spcAft>
+            </a:pPr>
+            <a:r>
+              <a:rPr sz="1500">
+                <a:solidFill>
+                  <a:srgbClr val="22282E"/>
+                </a:solidFill>
+              </a:rPr>
+              <a:t>•  Enumera las GPOs del dominio y a qué OUs aplican.</a:t>
+            </a:r>
+          </a:p>
+          <a:p>
+            <a:pPr>
+              <a:spcAft>
+                <a:spcPts val="600"/>
+              </a:spcAft>
+            </a:pPr>
+            <a:r>
+              <a:rPr sz="1500">
+                <a:solidFill>
+                  <a:srgbClr val="22282E"/>
+                </a:solidFill>
+              </a:rPr>
+              <a:t>•  Mapea las confianzas del forest y dibújalas.</a:t>
+            </a:r>
+          </a:p>
+          <a:p>
+            <a:pPr>
+              <a:spcAft>
+                <a:spcPts val="600"/>
+              </a:spcAft>
+            </a:pPr>
+            <a:r>
+              <a:rPr sz="1500">
+                <a:solidFill>
+                  <a:srgbClr val="22282E"/>
+                </a:solidFill>
+              </a:rPr>
+              <a:t>•  Compara el ruido (telemetría) de PowerView vs consultas LDAP puntuales.</a:t>
             </a:r>
           </a:p>
         </p:txBody>
@@ -3347,7 +3365,7 @@
                   <a:srgbClr val="0B3D2E"/>
                 </a:solidFill>
               </a:rPr>
-              <a:t>❓ Preguntas frecuentes</a:t>
+              <a:t>📝 Reto verificable</a:t>
             </a:r>
           </a:p>
         </p:txBody>
@@ -3385,82 +3403,22 @@
                   <a:srgbClr val="22282E"/>
                 </a:solidFill>
               </a:rPr>
-              <a:t>•  ❓ ¿Necesito ser admin para enumerar AD?</a:t>
-            </a:r>
-          </a:p>
-          <a:p>
-            <a:pPr>
-              <a:spcAft>
-                <a:spcPts val="600"/>
-              </a:spcAft>
-            </a:pPr>
-            <a:r>
-              <a:rPr sz="1500">
-                <a:solidFill>
-                  <a:srgbClr val="22282E"/>
-                </a:solidFill>
-              </a:rPr>
-              <a:t>•  No. Con cualquier cuenta de dominio válida se puede enumerar la mayor parte del directorio: ese es el diseño de AD y la razón de su exposición.</a:t>
-            </a:r>
-          </a:p>
-          <a:p>
-            <a:pPr>
-              <a:spcAft>
-                <a:spcPts val="600"/>
-              </a:spcAft>
-            </a:pPr>
-            <a:r>
-              <a:rPr sz="1500">
-                <a:solidFill>
-                  <a:srgbClr val="22282E"/>
-                </a:solidFill>
-              </a:rPr>
-              <a:t>•  ❓ ¿PowerView o BloodHound?</a:t>
-            </a:r>
-          </a:p>
-          <a:p>
-            <a:pPr>
-              <a:spcAft>
-                <a:spcPts val="600"/>
-              </a:spcAft>
-            </a:pPr>
-            <a:r>
-              <a:rPr sz="1500">
-                <a:solidFill>
-                  <a:srgbClr val="22282E"/>
-                </a:solidFill>
-              </a:rPr>
-              <a:t>•  Ambos: PowerView para consultas puntuales interactivas; BloodHound para visualizar relaciones y rutas de ataque (Clase 173).</a:t>
-            </a:r>
-          </a:p>
-          <a:p>
-            <a:pPr>
-              <a:spcAft>
-                <a:spcPts val="600"/>
-              </a:spcAft>
-            </a:pPr>
-            <a:r>
-              <a:rPr sz="1500">
-                <a:solidFill>
-                  <a:srgbClr val="22282E"/>
-                </a:solidFill>
-              </a:rPr>
-              <a:t>•  ❓ ¿Qué es GOAD?</a:t>
-            </a:r>
-          </a:p>
-          <a:p>
-            <a:pPr>
-              <a:spcAft>
-                <a:spcPts val="600"/>
-              </a:spcAft>
-            </a:pPr>
-            <a:r>
-              <a:rPr sz="1500">
-                <a:solidFill>
-                  <a:srgbClr val="22282E"/>
-                </a:solidFill>
-              </a:rPr>
-              <a:t>•  Game of Active Directory: un laboratorio vulnerable y reproducible pensado para practicar ataques a AD de forma legal en tu propia máquina.</a:t>
+              <a:t>•  Produce un mapa del dominio de tu AD lab: usuarios privilegiados, cuentas con SPN, GPOs relevantes, confianzas y al menos una relación ACL potencialmente abusable, recogido además con un collector de…</a:t>
+            </a:r>
+          </a:p>
+          <a:p>
+            <a:pPr>
+              <a:spcAft>
+                <a:spcPts val="600"/>
+              </a:spcAft>
+            </a:pPr>
+            <a:r>
+              <a:rPr sz="1500">
+                <a:solidFill>
+                  <a:srgbClr val="22282E"/>
+                </a:solidFill>
+              </a:rPr>
+              <a:t>•  Criterio de aceptación: entregas un documento/diagrama con esos cinco elementos, cada dato verificable en el lab, y un archivo de recolección listo para importar en BloodHound.</a:t>
             </a:r>
           </a:p>
         </p:txBody>
@@ -3511,7 +3469,7 @@
                   <a:srgbClr val="0B3D2E"/>
                 </a:solidFill>
               </a:rPr>
-              <a:t>🔗 Referencias</a:t>
+              <a:t>⚠️ Errores comunes</a:t>
             </a:r>
           </a:p>
         </p:txBody>
@@ -3549,56 +3507,474 @@
                   <a:srgbClr val="22282E"/>
                 </a:solidFill>
               </a:rPr>
-              <a:t>•  The Hacker Recipes — AD enumeration. &lt;https://www.thehacker.recipes/&gt;</a:t>
-            </a:r>
-          </a:p>
-          <a:p>
-            <a:pPr>
-              <a:spcAft>
-                <a:spcPts val="600"/>
-              </a:spcAft>
-            </a:pPr>
-            <a:r>
-              <a:rPr sz="1500">
-                <a:solidFill>
-                  <a:srgbClr val="22282E"/>
-                </a:solidFill>
-              </a:rPr>
-              <a:t>•  GOAD. &lt;https://github.com/Orange-Cyberdefense/GOAD&gt;</a:t>
-            </a:r>
-          </a:p>
-          <a:p>
-            <a:pPr>
-              <a:spcAft>
-                <a:spcPts val="600"/>
-              </a:spcAft>
-            </a:pPr>
-            <a:r>
-              <a:rPr sz="1500">
-                <a:solidFill>
-                  <a:srgbClr val="22282E"/>
-                </a:solidFill>
-              </a:rPr>
-              <a:t>•  PowerSploit/PowerView. &lt;https://github.com/PowerShellMafia/PowerSploit&gt;</a:t>
-            </a:r>
-          </a:p>
-          <a:p>
-            <a:pPr>
-              <a:spcAft>
-                <a:spcPts val="600"/>
-              </a:spcAft>
-            </a:pPr>
-            <a:r>
-              <a:rPr sz="1500">
-                <a:solidFill>
-                  <a:srgbClr val="22282E"/>
-                </a:solidFill>
-              </a:rPr>
-              <a:t>•  Impacket. &lt;https://github.com/fortra/impacket&gt;</a:t>
-            </a:r>
-          </a:p>
-        </p:txBody>
-      </p:sp>
+              <a:t>•  LDAP no responde — DNS mal configurado o credenciales inválidas; verifica dominio y cuenta</a:t>
+            </a:r>
+          </a:p>
+          <a:p>
+            <a:pPr>
+              <a:spcAft>
+                <a:spcPts val="600"/>
+              </a:spcAft>
+            </a:pPr>
+            <a:r>
+              <a:rPr sz="1500">
+                <a:solidFill>
+                  <a:srgbClr val="22282E"/>
+                </a:solidFill>
+              </a:rPr>
+              <a:t>•  PowerView bloqueado por AMSI — Import detectado; aplica lo visto en la Clase 169 en el lab</a:t>
+            </a:r>
+          </a:p>
+          <a:p>
+            <a:pPr>
+              <a:spcAft>
+                <a:spcPts val="600"/>
+              </a:spcAft>
+            </a:pPr>
+            <a:r>
+              <a:rPr sz="1500">
+                <a:solidFill>
+                  <a:srgbClr val="22282E"/>
+                </a:solidFill>
+              </a:rPr>
+              <a:t>•  No aparecen SPNs — No hay cuentas de servicio con SPN registrado; revisa el diseño del lab</a:t>
+            </a:r>
+          </a:p>
+          <a:p>
+            <a:pPr>
+              <a:spcAft>
+                <a:spcPts val="600"/>
+              </a:spcAft>
+            </a:pPr>
+            <a:r>
+              <a:rPr sz="1500">
+                <a:solidFill>
+                  <a:srgbClr val="22282E"/>
+                </a:solidFill>
+              </a:rPr>
+              <a:t>•  Enumeración muy ruidosa — Consultas masivas; usa peticiones dirigidas y espaciadas</a:t>
+            </a:r>
+          </a:p>
+          <a:p>
+            <a:pPr>
+              <a:spcAft>
+                <a:spcPts val="600"/>
+              </a:spcAft>
+            </a:pPr>
+            <a:r>
+              <a:rPr sz="1500">
+                <a:solidFill>
+                  <a:srgbClr val="22282E"/>
+                </a:solidFill>
+              </a:rPr>
+              <a:t>•  El collector falla — Falta conectividad al DC o permisos; ejecuta con la cuenta correcta</a:t>
+            </a:r>
+          </a:p>
+        </p:txBody>
+      </p:sp>
+    </p:spTree>
+  </p:cSld>
+  <p:clrMapOvr>
+    <a:masterClrMapping/>
+  </p:clrMapOvr>
+</p:sld>
+</file>
+
+<file path=ppt/slides/slide13.xml><?xml version="1.0" encoding="utf-8"?>
+<p:sld xmlns:a="http://schemas.openxmlformats.org/drawingml/2006/main" xmlns:p="http://schemas.openxmlformats.org/presentationml/2006/main" xmlns:r="http://schemas.openxmlformats.org/officeDocument/2006/relationships">
+  <p:cSld>
+    <p:spTree>
+      <p:nvGrpSpPr>
+        <p:cNvPr id="1" name=""/>
+        <p:cNvGrpSpPr/>
+        <p:nvPr/>
+      </p:nvGrpSpPr>
+      <p:grpSpPr/>
+      <p:sp>
+        <p:nvSpPr>
+          <p:cNvPr id="2" name="TextBox 1"/>
+          <p:cNvSpPr txBox="1"/>
+          <p:nvPr/>
+        </p:nvSpPr>
+        <p:spPr>
+          <a:xfrm>
+            <a:off x="457200" y="320040"/>
+            <a:ext cx="8229600" cy="822960"/>
+          </a:xfrm>
+          <a:prstGeom prst="rect">
+            <a:avLst/>
+          </a:prstGeom>
+          <a:noFill/>
+        </p:spPr>
+        <p:txBody>
+          <a:bodyPr wrap="square">
+            <a:spAutoFit/>
+          </a:bodyPr>
+          <a:lstStyle/>
+          <a:p>
+            <a:r>
+              <a:rPr sz="2600" b="1">
+                <a:solidFill>
+                  <a:srgbClr val="0B3D2E"/>
+                </a:solidFill>
+              </a:rPr>
+              <a:t>❓ Preguntas frecuentes</a:t>
+            </a:r>
+          </a:p>
+        </p:txBody>
+      </p:sp>
+      <p:sp>
+        <p:nvSpPr>
+          <p:cNvPr id="3" name="TextBox 2"/>
+          <p:cNvSpPr txBox="1"/>
+          <p:nvPr/>
+        </p:nvSpPr>
+        <p:spPr>
+          <a:xfrm>
+            <a:off x="457200" y="1280160"/>
+            <a:ext cx="8229600" cy="4937760"/>
+          </a:xfrm>
+          <a:prstGeom prst="rect">
+            <a:avLst/>
+          </a:prstGeom>
+          <a:noFill/>
+        </p:spPr>
+        <p:txBody>
+          <a:bodyPr wrap="square">
+            <a:spAutoFit/>
+          </a:bodyPr>
+          <a:lstStyle/>
+          <a:p>
+            <a:pPr>
+              <a:spcAft>
+                <a:spcPts val="600"/>
+              </a:spcAft>
+            </a:pPr>
+            <a:r>
+              <a:rPr sz="1500">
+                <a:solidFill>
+                  <a:srgbClr val="22282E"/>
+                </a:solidFill>
+              </a:rPr>
+              <a:t>•  ❓ ¿Necesito ser admin para enumerar AD?</a:t>
+            </a:r>
+          </a:p>
+          <a:p>
+            <a:pPr>
+              <a:spcAft>
+                <a:spcPts val="600"/>
+              </a:spcAft>
+            </a:pPr>
+            <a:r>
+              <a:rPr sz="1500">
+                <a:solidFill>
+                  <a:srgbClr val="22282E"/>
+                </a:solidFill>
+              </a:rPr>
+              <a:t>•  No necesariamente. Por defecto, una identidad autenticada puede leer muchos objetos y atributos necesarios para operar AD DS, pero ACL, endurecimiento y tipo de objeto pueden limitar la vista. La…</a:t>
+            </a:r>
+          </a:p>
+          <a:p>
+            <a:pPr>
+              <a:spcAft>
+                <a:spcPts val="600"/>
+              </a:spcAft>
+            </a:pPr>
+            <a:r>
+              <a:rPr sz="1500">
+                <a:solidFill>
+                  <a:srgbClr val="22282E"/>
+                </a:solidFill>
+              </a:rPr>
+              <a:t>•  ❓ ¿PowerView o BloodHound?</a:t>
+            </a:r>
+          </a:p>
+          <a:p>
+            <a:pPr>
+              <a:spcAft>
+                <a:spcPts val="600"/>
+              </a:spcAft>
+            </a:pPr>
+            <a:r>
+              <a:rPr sz="1500">
+                <a:solidFill>
+                  <a:srgbClr val="22282E"/>
+                </a:solidFill>
+              </a:rPr>
+              <a:t>•  Ambos: PowerView para consultas puntuales interactivas; BloodHound para visualizar relaciones y rutas de ataque (Clase 173).</a:t>
+            </a:r>
+          </a:p>
+          <a:p>
+            <a:pPr>
+              <a:spcAft>
+                <a:spcPts val="600"/>
+              </a:spcAft>
+            </a:pPr>
+            <a:r>
+              <a:rPr sz="1500">
+                <a:solidFill>
+                  <a:srgbClr val="22282E"/>
+                </a:solidFill>
+              </a:rPr>
+              <a:t>•  ❓ ¿Qué es GOAD?</a:t>
+            </a:r>
+          </a:p>
+          <a:p>
+            <a:pPr>
+              <a:spcAft>
+                <a:spcPts val="600"/>
+              </a:spcAft>
+            </a:pPr>
+            <a:r>
+              <a:rPr sz="1500">
+                <a:solidFill>
+                  <a:srgbClr val="22282E"/>
+                </a:solidFill>
+              </a:rPr>
+              <a:t>•  Game of Active Directory: un laboratorio vulnerable y reproducible pensado para practicar ataques a AD de forma legal en tu propia máquina.</a:t>
+            </a:r>
+          </a:p>
+        </p:txBody>
+      </p:sp>
+    </p:spTree>
+  </p:cSld>
+  <p:clrMapOvr>
+    <a:masterClrMapping/>
+  </p:clrMapOvr>
+</p:sld>
+</file>
+
+<file path=ppt/slides/slide14.xml><?xml version="1.0" encoding="utf-8"?>
+<p:sld xmlns:a="http://schemas.openxmlformats.org/drawingml/2006/main" xmlns:p="http://schemas.openxmlformats.org/presentationml/2006/main" xmlns:r="http://schemas.openxmlformats.org/officeDocument/2006/relationships">
+  <p:cSld>
+    <p:spTree>
+      <p:nvGrpSpPr>
+        <p:cNvPr id="1" name=""/>
+        <p:cNvGrpSpPr/>
+        <p:nvPr/>
+      </p:nvGrpSpPr>
+      <p:grpSpPr/>
+      <p:sp>
+        <p:nvSpPr>
+          <p:cNvPr id="2" name="TextBox 1"/>
+          <p:cNvSpPr txBox="1"/>
+          <p:nvPr/>
+        </p:nvSpPr>
+        <p:spPr>
+          <a:xfrm>
+            <a:off x="457200" y="320040"/>
+            <a:ext cx="8229600" cy="822960"/>
+          </a:xfrm>
+          <a:prstGeom prst="rect">
+            <a:avLst/>
+          </a:prstGeom>
+          <a:noFill/>
+        </p:spPr>
+        <p:txBody>
+          <a:bodyPr wrap="square">
+            <a:spAutoFit/>
+          </a:bodyPr>
+          <a:lstStyle/>
+          <a:p>
+            <a:r>
+              <a:rPr sz="2600" b="1">
+                <a:solidFill>
+                  <a:srgbClr val="0B3D2E"/>
+                </a:solidFill>
+              </a:rPr>
+              <a:t>🔗 Referencias</a:t>
+            </a:r>
+          </a:p>
+        </p:txBody>
+      </p:sp>
+      <p:sp>
+        <p:nvSpPr>
+          <p:cNvPr id="3" name="TextBox 2"/>
+          <p:cNvSpPr txBox="1"/>
+          <p:nvPr/>
+        </p:nvSpPr>
+        <p:spPr>
+          <a:xfrm>
+            <a:off x="457200" y="1280160"/>
+            <a:ext cx="8229600" cy="4937760"/>
+          </a:xfrm>
+          <a:prstGeom prst="rect">
+            <a:avLst/>
+          </a:prstGeom>
+          <a:noFill/>
+        </p:spPr>
+        <p:txBody>
+          <a:bodyPr wrap="square">
+            <a:spAutoFit/>
+          </a:bodyPr>
+          <a:lstStyle/>
+          <a:p>
+            <a:pPr>
+              <a:spcAft>
+                <a:spcPts val="600"/>
+              </a:spcAft>
+            </a:pPr>
+            <a:r>
+              <a:rPr sz="1500">
+                <a:solidFill>
+                  <a:srgbClr val="22282E"/>
+                </a:solidFill>
+              </a:rPr>
+              <a:t>•  Microsoft — Active Directory Protocols Overview. &lt;https://learn.microsoft.com/en-us/openspecs/windowsprotocols/ms-adod/9003d65b-05eb-4ba1-a006-dd617476319d&gt; — fuente principal para distinguir AD DS…</a:t>
+            </a:r>
+          </a:p>
+          <a:p>
+            <a:pPr>
+              <a:spcAft>
+                <a:spcPts val="600"/>
+              </a:spcAft>
+            </a:pPr>
+            <a:r>
+              <a:rPr sz="1500">
+                <a:solidFill>
+                  <a:srgbClr val="22282E"/>
+                </a:solidFill>
+              </a:rPr>
+              <a:t>•  Microsoft — Active Directory Data Model and glossary. &lt;https://learn.microsoft.com/en-us/openspecs/windowsprotocols/ms-addm/bf6e41b7-bae0-4a47-affd-6f18218a537c&gt; — sustenta los conceptos de objeto…</a:t>
+            </a:r>
+          </a:p>
+          <a:p>
+            <a:pPr>
+              <a:spcAft>
+                <a:spcPts val="600"/>
+              </a:spcAft>
+            </a:pPr>
+            <a:r>
+              <a:rPr sz="1500">
+                <a:solidFill>
+                  <a:srgbClr val="22282E"/>
+                </a:solidFill>
+              </a:rPr>
+              <a:t>•  MITRE ATT&amp;CK — Permission Groups Discovery (T1069). &lt;https://attack.mitre.org/techniques/T1069/&gt; — referencia para explicar el valor ofensivo y la detección de enumeración de grupos.</a:t>
+            </a:r>
+          </a:p>
+          <a:p>
+            <a:pPr>
+              <a:spcAft>
+                <a:spcPts val="600"/>
+              </a:spcAft>
+            </a:pPr>
+            <a:r>
+              <a:rPr sz="1500">
+                <a:solidFill>
+                  <a:srgbClr val="22282E"/>
+                </a:solidFill>
+              </a:rPr>
+              <a:t>•  SpecterOps — BloodHound: Attack Paths. &lt;https://bloodhound.specterops.io/analyze-data/findings/attack-paths&gt; — base del razonamiento como grafo y de la necesidad de validar los caminos calculados.</a:t>
+            </a:r>
+          </a:p>
+          <a:p>
+            <a:pPr>
+              <a:spcAft>
+                <a:spcPts val="600"/>
+              </a:spcAft>
+            </a:pPr>
+            <a:r>
+              <a:rPr sz="1500">
+                <a:solidFill>
+                  <a:srgbClr val="22282E"/>
+                </a:solidFill>
+              </a:rPr>
+              <a:t>•  GOAD. &lt;https://github.com/Orange-Cyberdefense/GOAD&gt; — laboratorio vulnerable reproducible utilizado en los ejercicios.</a:t>
+            </a:r>
+          </a:p>
+          <a:p>
+            <a:pPr>
+              <a:spcAft>
+                <a:spcPts val="600"/>
+              </a:spcAft>
+            </a:pPr>
+            <a:r>
+              <a:rPr sz="1500">
+                <a:solidFill>
+                  <a:srgbClr val="22282E"/>
+                </a:solidFill>
+              </a:rPr>
+              <a:t>•  PowerSploit/PowerView. &lt;https://github.com/PowerShellMafia/PowerSploit&gt; e Impacket. &lt;https://github.com/fortra/impacket&gt; — documentación de las herramientas concretas del laboratorio.</a:t>
+            </a:r>
+          </a:p>
+        </p:txBody>
+      </p:sp>
+    </p:spTree>
+  </p:cSld>
+  <p:clrMapOvr>
+    <a:masterClrMapping/>
+  </p:clrMapOvr>
+</p:sld>
+</file>
+
+<file path=ppt/slides/slide15.xml><?xml version="1.0" encoding="utf-8"?>
+<p:sld xmlns:a="http://schemas.openxmlformats.org/drawingml/2006/main" xmlns:p="http://schemas.openxmlformats.org/presentationml/2006/main" xmlns:r="http://schemas.openxmlformats.org/officeDocument/2006/relationships">
+  <p:cSld>
+    <p:spTree>
+      <p:nvGrpSpPr>
+        <p:cNvPr id="1" name=""/>
+        <p:cNvGrpSpPr/>
+        <p:nvPr/>
+      </p:nvGrpSpPr>
+      <p:grpSpPr/>
+      <p:sp>
+        <p:nvSpPr>
+          <p:cNvPr id="2" name="TextBox 1"/>
+          <p:cNvSpPr txBox="1"/>
+          <p:nvPr/>
+        </p:nvSpPr>
+        <p:spPr>
+          <a:xfrm>
+            <a:off x="457200" y="274320"/>
+            <a:ext cx="8229600" cy="640080"/>
+          </a:xfrm>
+          <a:prstGeom prst="rect">
+            <a:avLst/>
+          </a:prstGeom>
+          <a:noFill/>
+        </p:spPr>
+        <p:txBody>
+          <a:bodyPr wrap="square">
+            <a:spAutoFit/>
+          </a:bodyPr>
+          <a:lstStyle/>
+          <a:p>
+            <a:r>
+              <a:rPr sz="2200" b="1">
+                <a:solidFill>
+                  <a:srgbClr val="0B3D2E"/>
+                </a:solidFill>
+              </a:rPr>
+              <a:t>Diagrama de la clase</a:t>
+            </a:r>
+          </a:p>
+        </p:txBody>
+      </p:sp>
+      <p:pic>
+        <p:nvPicPr>
+          <p:cNvPr id="3" name="Picture 2" descr="7c7daba76b9dbc53.png"/>
+          <p:cNvPicPr>
+            <a:picLocks noChangeAspect="1"/>
+          </p:cNvPicPr>
+          <p:nvPr/>
+        </p:nvPicPr>
+        <p:blipFill>
+          <a:blip r:embed="rId2"/>
+          <a:stretch>
+            <a:fillRect/>
+          </a:stretch>
+        </p:blipFill>
+        <p:spPr>
+          <a:xfrm>
+            <a:off x="457200" y="1217713"/>
+            <a:ext cx="8229600" cy="5062653"/>
+          </a:xfrm>
+          <a:prstGeom prst="rect">
+            <a:avLst/>
+          </a:prstGeom>
+        </p:spPr>
+      </p:pic>
     </p:spTree>
   </p:cSld>
   <p:clrMapOvr>
@@ -3683,7 +4059,7 @@
                   <a:srgbClr val="22282E"/>
                 </a:solidFill>
               </a:rPr>
-              <a:t>•  Aprender a enumerar un dominio de Active Directory desde una posición de foothold: usuarios, grupos, equipos, políticas, confianzas, SPNs y relaciones. La enumeración es el 80% del trabajo en AD: cuanto mejor entiendas la estructura del dominio, más limpio y dirigido será el ataque. El alumno montará un AD lab (o usará GOAD) y lo mapeará.</a:t>
+              <a:t>•  Aprender a enumerar un dominio de Active Directory desde una posición de foothold: usuarios, grupos, equipos, políticas, confianzas, SPNs y relaciones. La enumeración es el 80% del trabajo en AD…</a:t>
             </a:r>
           </a:p>
         </p:txBody>
@@ -4077,7 +4453,7 @@
                   <a:srgbClr val="0B3D2E"/>
                 </a:solidFill>
               </a:rPr>
-              <a:t>📖 Definiciones y características</a:t>
+              <a:t>🧠 Explicación en profundidad</a:t>
             </a:r>
           </a:p>
         </p:txBody>
@@ -4115,82 +4491,97 @@
                   <a:srgbClr val="22282E"/>
                 </a:solidFill>
               </a:rPr>
-              <a:t>•  Active Directory: servicio de directorio de Microsoft para gestionar identidades y recursos. Característica: LDAP + Kerberos como columna vertebral.</a:t>
-            </a:r>
-          </a:p>
-          <a:p>
-            <a:pPr>
-              <a:spcAft>
-                <a:spcPts val="600"/>
-              </a:spcAft>
-            </a:pPr>
-            <a:r>
-              <a:rPr sz="1500">
-                <a:solidFill>
-                  <a:srgbClr val="22282E"/>
-                </a:solidFill>
-              </a:rPr>
-              <a:t>•  LDAP: protocolo de consulta del directorio. Característica: permite enumerar casi todo con una cuenta de dominio válida.</a:t>
-            </a:r>
-          </a:p>
-          <a:p>
-            <a:pPr>
-              <a:spcAft>
-                <a:spcPts val="600"/>
-              </a:spcAft>
-            </a:pPr>
-            <a:r>
-              <a:rPr sz="1500">
-                <a:solidFill>
-                  <a:srgbClr val="22282E"/>
-                </a:solidFill>
-              </a:rPr>
-              <a:t>•  SPN (Service Principal Name): identificador de un servicio ligado a una cuenta. Característica: habilita Kerberoasting.</a:t>
-            </a:r>
-          </a:p>
-          <a:p>
-            <a:pPr>
-              <a:spcAft>
-                <a:spcPts val="600"/>
-              </a:spcAft>
-            </a:pPr>
-            <a:r>
-              <a:rPr sz="1500">
-                <a:solidFill>
-                  <a:srgbClr val="22282E"/>
-                </a:solidFill>
-              </a:rPr>
-              <a:t>•  GPO (Group Policy Object): política aplicada a OUs/equipos. Característica: mal configurada, ofrece escalado.</a:t>
-            </a:r>
-          </a:p>
-          <a:p>
-            <a:pPr>
-              <a:spcAft>
-                <a:spcPts val="600"/>
-              </a:spcAft>
-            </a:pPr>
-            <a:r>
-              <a:rPr sz="1500">
-                <a:solidFill>
-                  <a:srgbClr val="22282E"/>
-                </a:solidFill>
-              </a:rPr>
-              <a:t>•  ACL / ACE: permisos sobre objetos de AD. Característica: relaciones abusables (GenericAll, WriteDACL).</a:t>
-            </a:r>
-          </a:p>
-          <a:p>
-            <a:pPr>
-              <a:spcAft>
-                <a:spcPts val="600"/>
-              </a:spcAft>
-            </a:pPr>
-            <a:r>
-              <a:rPr sz="1500">
-                <a:solidFill>
-                  <a:srgbClr val="22282E"/>
-                </a:solidFill>
-              </a:rPr>
-              <a:t>•  Trust (confianza): relación entre dominios/forests. Característica: puede permitir saltar de un dominio a otro.</a:t>
+              <a:t>•  AD DS no es solamente una lista de usuarios. Es un servicio de directorio distribuido entre controladores de dominio que almacena objetos —cuentas, equipos, grupos, unidades organizativas y…</a:t>
+            </a:r>
+          </a:p>
+          <a:p>
+            <a:pPr>
+              <a:spcAft>
+                <a:spcPts val="600"/>
+              </a:spcAft>
+            </a:pPr>
+            <a:r>
+              <a:rPr sz="1500">
+                <a:solidFill>
+                  <a:srgbClr val="22282E"/>
+                </a:solidFill>
+              </a:rPr>
+              <a:t>•  La enumeración útil reconstruye tres planos: identidad (quién es quién), recursos (qué equipos y servicios existen) y control (quién puede modificar o utilizar qué). Una cuenta aparentemente común…</a:t>
+            </a:r>
+          </a:p>
+          <a:p>
+            <a:pPr>
+              <a:spcAft>
+                <a:spcPts val="600"/>
+              </a:spcAft>
+            </a:pPr>
+            <a:r>
+              <a:rPr sz="1500">
+                <a:solidFill>
+                  <a:srgbClr val="22282E"/>
+                </a:solidFill>
+              </a:rPr>
+              <a:t>•  Una consulta necesita una base de búsqueda, un alcance, un filtro y los atributos que se desean recuperar. Pedir todo el dominio con todos los atributos es sencillo, pero genera volumen y dificulta…</a:t>
+            </a:r>
+          </a:p>
+          <a:p>
+            <a:pPr>
+              <a:spcAft>
+                <a:spcPts val="600"/>
+              </a:spcAft>
+            </a:pPr>
+            <a:r>
+              <a:rPr sz="1500">
+                <a:solidFill>
+                  <a:srgbClr val="22282E"/>
+                </a:solidFill>
+              </a:rPr>
+              <a:t>•  El distinguished name ubica un objeto en el árbol; el sAMAccountName conserva un nombre de inicio de sesión histórico y el SID identifica al principal de seguridad dentro de las relaciones de…</a:t>
+            </a:r>
+          </a:p>
+          <a:p>
+            <a:pPr>
+              <a:spcAft>
+                <a:spcPts val="600"/>
+              </a:spcAft>
+            </a:pPr>
+            <a:r>
+              <a:rPr sz="1500">
+                <a:solidFill>
+                  <a:srgbClr val="22282E"/>
+                </a:solidFill>
+              </a:rPr>
+              <a:t>•  PowerView, Impacket, NetExec y los colectores de BloodHound son medios de consulta, no conclusiones. Cada resultado importante debe verificarse mediante otra vista o consulta y conservar su…</a:t>
+            </a:r>
+          </a:p>
+          <a:p>
+            <a:pPr>
+              <a:spcAft>
+                <a:spcPts val="600"/>
+              </a:spcAft>
+            </a:pPr>
+            <a:r>
+              <a:rPr sz="1500">
+                <a:solidFill>
+                  <a:srgbClr val="22282E"/>
+                </a:solidFill>
+              </a:rPr>
+              <a:t>•  BloodHound representa relaciones como nodos y aristas para ayudar a razonar sobre caminos. Eso no convierte cada camino calculado en uno ejecutable: pueden intervenir segmentación, sesiones…</a:t>
+            </a:r>
+          </a:p>
+          <a:p>
+            <a:pPr>
+              <a:spcAft>
+                <a:spcPts val="600"/>
+              </a:spcAft>
+            </a:pPr>
+            <a:r>
+              <a:rPr sz="1500">
+                <a:solidFill>
+                  <a:srgbClr val="22282E"/>
+                </a:solidFill>
+              </a:rPr>
+              <a:t>•  Las lecturas legítimas del directorio son necesarias para la administración, por lo que prevenirlas de forma absoluta no suele ser viable. La defensa busca secuencias, volumen, origen e identidad: un…</a:t>
             </a:r>
           </a:p>
         </p:txBody>
@@ -4241,7 +4632,7 @@
                   <a:srgbClr val="0B3D2E"/>
                 </a:solidFill>
               </a:rPr>
-              <a:t>🧰 Herramientas y preparación</a:t>
+              <a:t>📖 Definiciones y características</a:t>
             </a:r>
           </a:p>
         </p:txBody>
@@ -4279,52 +4670,82 @@
                   <a:srgbClr val="22282E"/>
                 </a:solidFill>
               </a:rPr>
-              <a:t>•  AD lab: un DC Windows Server + 1–2 workstations, o desplegar GOAD.</a:t>
-            </a:r>
-          </a:p>
-          <a:p>
-            <a:pPr>
-              <a:spcAft>
-                <a:spcPts val="600"/>
-              </a:spcAft>
-            </a:pPr>
-            <a:r>
-              <a:rPr sz="1500">
-                <a:solidFill>
-                  <a:srgbClr val="22282E"/>
-                </a:solidFill>
-              </a:rPr>
-              <a:t>•  PowerView (PowerShell), NetExec (nxc), ldapsearch, BloodHound collectors (Clase 173).</a:t>
-            </a:r>
-          </a:p>
-          <a:p>
-            <a:pPr>
-              <a:spcAft>
-                <a:spcPts val="600"/>
-              </a:spcAft>
-            </a:pPr>
-            <a:r>
-              <a:rPr sz="1500">
-                <a:solidFill>
-                  <a:srgbClr val="22282E"/>
-                </a:solidFill>
-              </a:rPr>
-              <a:t>•  Impacket (GetADUsers.py, GetUserSPNs.py) desde Linux.</a:t>
-            </a:r>
-          </a:p>
-          <a:p>
-            <a:pPr>
-              <a:spcAft>
-                <a:spcPts val="600"/>
-              </a:spcAft>
-            </a:pPr>
-            <a:r>
-              <a:rPr sz="1500">
-                <a:solidFill>
-                  <a:srgbClr val="22282E"/>
-                </a:solidFill>
-              </a:rPr>
-              <a:t>•  Una cuenta de dominio de bajo privilegio para partir del foothold.</a:t>
+              <a:t>•  Active Directory: servicio de directorio de Microsoft para gestionar identidades y recursos. Característica: LDAP + Kerberos como columna vertebral.</a:t>
+            </a:r>
+          </a:p>
+          <a:p>
+            <a:pPr>
+              <a:spcAft>
+                <a:spcPts val="600"/>
+              </a:spcAft>
+            </a:pPr>
+            <a:r>
+              <a:rPr sz="1500">
+                <a:solidFill>
+                  <a:srgbClr val="22282E"/>
+                </a:solidFill>
+              </a:rPr>
+              <a:t>•  LDAP: protocolo de consulta del directorio. Característica: permite enumerar casi todo con una cuenta de dominio válida.</a:t>
+            </a:r>
+          </a:p>
+          <a:p>
+            <a:pPr>
+              <a:spcAft>
+                <a:spcPts val="600"/>
+              </a:spcAft>
+            </a:pPr>
+            <a:r>
+              <a:rPr sz="1500">
+                <a:solidFill>
+                  <a:srgbClr val="22282E"/>
+                </a:solidFill>
+              </a:rPr>
+              <a:t>•  SPN (Service Principal Name): identificador de un servicio ligado a una cuenta. Característica: habilita Kerberoasting.</a:t>
+            </a:r>
+          </a:p>
+          <a:p>
+            <a:pPr>
+              <a:spcAft>
+                <a:spcPts val="600"/>
+              </a:spcAft>
+            </a:pPr>
+            <a:r>
+              <a:rPr sz="1500">
+                <a:solidFill>
+                  <a:srgbClr val="22282E"/>
+                </a:solidFill>
+              </a:rPr>
+              <a:t>•  GPO (Group Policy Object): política aplicada a OUs/equipos. Característica: mal configurada, ofrece escalado.</a:t>
+            </a:r>
+          </a:p>
+          <a:p>
+            <a:pPr>
+              <a:spcAft>
+                <a:spcPts val="600"/>
+              </a:spcAft>
+            </a:pPr>
+            <a:r>
+              <a:rPr sz="1500">
+                <a:solidFill>
+                  <a:srgbClr val="22282E"/>
+                </a:solidFill>
+              </a:rPr>
+              <a:t>•  ACL / ACE: permisos sobre objetos de AD. Característica: relaciones abusables (GenericAll, WriteDACL).</a:t>
+            </a:r>
+          </a:p>
+          <a:p>
+            <a:pPr>
+              <a:spcAft>
+                <a:spcPts val="600"/>
+              </a:spcAft>
+            </a:pPr>
+            <a:r>
+              <a:rPr sz="1500">
+                <a:solidFill>
+                  <a:srgbClr val="22282E"/>
+                </a:solidFill>
+              </a:rPr>
+              <a:t>•  Trust (confianza): relación entre dominios/forests. Característica: puede permitir saltar de un dominio a otro.</a:t>
             </a:r>
           </a:p>
         </p:txBody>
@@ -4375,7 +4796,7 @@
                   <a:srgbClr val="0B3D2E"/>
                 </a:solidFill>
               </a:rPr>
-              <a:t>🧪 Laboratorio guiado</a:t>
+              <a:t>📔 Glosario</a:t>
             </a:r>
           </a:p>
         </p:txBody>
@@ -4413,97 +4834,97 @@
                   <a:srgbClr val="22282E"/>
                 </a:solidFill>
               </a:rPr>
-              <a:t>•  Despliega el lab. Levanta GOAD o tu DC + workstations. Verifica resolución DNS al dominio (ej. lab.local).</a:t>
-            </a:r>
-          </a:p>
-          <a:p>
-            <a:pPr>
-              <a:spcAft>
-                <a:spcPts val="600"/>
-              </a:spcAft>
-            </a:pPr>
-            <a:r>
-              <a:rPr sz="1500">
-                <a:solidFill>
-                  <a:srgbClr val="22282E"/>
-                </a:solidFill>
-              </a:rPr>
-              <a:t>•  Enumera con nxc: nxc smb 10.10.10.10 -u user -p 'pass' --users --groups para listar usuarios y grupos.</a:t>
-            </a:r>
-          </a:p>
-          <a:p>
-            <a:pPr>
-              <a:spcAft>
-                <a:spcPts val="600"/>
-              </a:spcAft>
-            </a:pPr>
-            <a:r>
-              <a:rPr sz="1500">
-                <a:solidFill>
-                  <a:srgbClr val="22282E"/>
-                </a:solidFill>
-              </a:rPr>
-              <a:t>•  PowerView desde Windows. Importa el módulo y ejecuta Get-DomainUser, Get-DomainGroupMember "Domain Admins", Get-DomainComputer.</a:t>
-            </a:r>
-          </a:p>
-          <a:p>
-            <a:pPr>
-              <a:spcAft>
-                <a:spcPts val="600"/>
-              </a:spcAft>
-            </a:pPr>
-            <a:r>
-              <a:rPr sz="1500">
-                <a:solidFill>
-                  <a:srgbClr val="22282E"/>
-                </a:solidFill>
-              </a:rPr>
-              <a:t>•  Busca SPNs: con Impacket GetUserSPNs.py lab.local/user:pass -dc-ip 10.10.10.10 para localizar cuentas de servicio (insumo de la próxima clase).</a:t>
-            </a:r>
-          </a:p>
-          <a:p>
-            <a:pPr>
-              <a:spcAft>
-                <a:spcPts val="600"/>
-              </a:spcAft>
-            </a:pPr>
-            <a:r>
-              <a:rPr sz="1500">
-                <a:solidFill>
-                  <a:srgbClr val="22282E"/>
-                </a:solidFill>
-              </a:rPr>
-              <a:t>•  Consulta LDAP directa: ldapsearch -x -H ldap://10.10.10.10 -D 'user@lab.local' -w pass -b 'DC=lab,DC=local' '(objectClass=user)'.</a:t>
-            </a:r>
-          </a:p>
-          <a:p>
-            <a:pPr>
-              <a:spcAft>
-                <a:spcPts val="600"/>
-              </a:spcAft>
-            </a:pPr>
-            <a:r>
-              <a:rPr sz="1500">
-                <a:solidFill>
-                  <a:srgbClr val="22282E"/>
-                </a:solidFill>
-              </a:rPr>
-              <a:t>•  Mapea confianzas: Get-DomainTrust y anota relaciones entre dominios del forest.</a:t>
-            </a:r>
-          </a:p>
-          <a:p>
-            <a:pPr>
-              <a:spcAft>
-                <a:spcPts val="600"/>
-              </a:spcAft>
-            </a:pPr>
-            <a:r>
-              <a:rPr sz="1500">
-                <a:solidFill>
-                  <a:srgbClr val="22282E"/>
-                </a:solidFill>
-              </a:rPr>
-              <a:t>•  Recoge para BloodHound. Ejecuta el collector (SharpHound/bloodhound-python) para el análisis de rutas de la Clase 173, y documenta cuentas privilegiadas y ACLs interesantes.</a:t>
+              <a:t>•  AD DS: servicio de directorio de dominio de Microsoft implementado por controladores de dominio.</a:t>
+            </a:r>
+          </a:p>
+          <a:p>
+            <a:pPr>
+              <a:spcAft>
+                <a:spcPts val="600"/>
+              </a:spcAft>
+            </a:pPr>
+            <a:r>
+              <a:rPr sz="1500">
+                <a:solidFill>
+                  <a:srgbClr val="22282E"/>
+                </a:solidFill>
+              </a:rPr>
+              <a:t>•  Objeto: entrada del directorio que representa una identidad, recurso, contenedor u otra entidad.</a:t>
+            </a:r>
+          </a:p>
+          <a:p>
+            <a:pPr>
+              <a:spcAft>
+                <a:spcPts val="600"/>
+              </a:spcAft>
+            </a:pPr>
+            <a:r>
+              <a:rPr sz="1500">
+                <a:solidFill>
+                  <a:srgbClr val="22282E"/>
+                </a:solidFill>
+              </a:rPr>
+              <a:t>•  Atributo: propiedad almacenada en un objeto, como nombre, SID o SPN.</a:t>
+            </a:r>
+          </a:p>
+          <a:p>
+            <a:pPr>
+              <a:spcAft>
+                <a:spcPts val="600"/>
+              </a:spcAft>
+            </a:pPr>
+            <a:r>
+              <a:rPr sz="1500">
+                <a:solidFill>
+                  <a:srgbClr val="22282E"/>
+                </a:solidFill>
+              </a:rPr>
+              <a:t>•  LDAP: protocolo estándar para consultar y actualizar servicios de directorio.</a:t>
+            </a:r>
+          </a:p>
+          <a:p>
+            <a:pPr>
+              <a:spcAft>
+                <a:spcPts val="600"/>
+              </a:spcAft>
+            </a:pPr>
+            <a:r>
+              <a:rPr sz="1500">
+                <a:solidFill>
+                  <a:srgbClr val="22282E"/>
+                </a:solidFill>
+              </a:rPr>
+              <a:t>•  Base DN: punto del árbol desde el cual comienza una búsqueda LDAP.</a:t>
+            </a:r>
+          </a:p>
+          <a:p>
+            <a:pPr>
+              <a:spcAft>
+                <a:spcPts val="600"/>
+              </a:spcAft>
+            </a:pPr>
+            <a:r>
+              <a:rPr sz="1500">
+                <a:solidFill>
+                  <a:srgbClr val="22282E"/>
+                </a:solidFill>
+              </a:rPr>
+              <a:t>•  Distinguished name (DN): nombre jerárquico único que ubica un objeto en el directorio.</a:t>
+            </a:r>
+          </a:p>
+          <a:p>
+            <a:pPr>
+              <a:spcAft>
+                <a:spcPts val="600"/>
+              </a:spcAft>
+            </a:pPr>
+            <a:r>
+              <a:rPr sz="1500">
+                <a:solidFill>
+                  <a:srgbClr val="22282E"/>
+                </a:solidFill>
+              </a:rPr>
+              <a:t>•  SID: identificador de un principal de seguridad utilizado en autorización.</a:t>
             </a:r>
           </a:p>
         </p:txBody>
@@ -4554,7 +4975,7 @@
                   <a:srgbClr val="0B3D2E"/>
                 </a:solidFill>
               </a:rPr>
-              <a:t>✍️ Ejercicios</a:t>
+              <a:t>🧰 Herramientas y preparación</a:t>
             </a:r>
           </a:p>
         </p:txBody>
@@ -4592,82 +5013,52 @@
                   <a:srgbClr val="22282E"/>
                 </a:solidFill>
               </a:rPr>
-              <a:t>•  Lista todos los miembros de "Domain Admins" del lab con dos herramientas distintas.</a:t>
-            </a:r>
-          </a:p>
-          <a:p>
-            <a:pPr>
-              <a:spcAft>
-                <a:spcPts val="600"/>
-              </a:spcAft>
-            </a:pPr>
-            <a:r>
-              <a:rPr sz="1500">
-                <a:solidFill>
-                  <a:srgbClr val="22282E"/>
-                </a:solidFill>
-              </a:rPr>
-              <a:t>•  Encuentra 3 cuentas con SPN y explica por qué son interesantes.</a:t>
-            </a:r>
-          </a:p>
-          <a:p>
-            <a:pPr>
-              <a:spcAft>
-                <a:spcPts val="600"/>
-              </a:spcAft>
-            </a:pPr>
-            <a:r>
-              <a:rPr sz="1500">
-                <a:solidFill>
-                  <a:srgbClr val="22282E"/>
-                </a:solidFill>
-              </a:rPr>
-              <a:t>•  Consulta por LDAP los usuarios con PASSWDNOTREQD o DONTREQUIREPREAUTH.</a:t>
-            </a:r>
-          </a:p>
-          <a:p>
-            <a:pPr>
-              <a:spcAft>
-                <a:spcPts val="600"/>
-              </a:spcAft>
-            </a:pPr>
-            <a:r>
-              <a:rPr sz="1500">
-                <a:solidFill>
-                  <a:srgbClr val="22282E"/>
-                </a:solidFill>
-              </a:rPr>
-              <a:t>•  Enumera las GPOs del dominio y a qué OUs aplican.</a:t>
-            </a:r>
-          </a:p>
-          <a:p>
-            <a:pPr>
-              <a:spcAft>
-                <a:spcPts val="600"/>
-              </a:spcAft>
-            </a:pPr>
-            <a:r>
-              <a:rPr sz="1500">
-                <a:solidFill>
-                  <a:srgbClr val="22282E"/>
-                </a:solidFill>
-              </a:rPr>
-              <a:t>•  Mapea las confianzas del forest y dibújalas.</a:t>
-            </a:r>
-          </a:p>
-          <a:p>
-            <a:pPr>
-              <a:spcAft>
-                <a:spcPts val="600"/>
-              </a:spcAft>
-            </a:pPr>
-            <a:r>
-              <a:rPr sz="1500">
-                <a:solidFill>
-                  <a:srgbClr val="22282E"/>
-                </a:solidFill>
-              </a:rPr>
-              <a:t>•  Compara el ruido (telemetría) de PowerView vs consultas LDAP puntuales.</a:t>
+              <a:t>•  AD lab: un DC Windows Server + 1–2 workstations, o desplegar GOAD.</a:t>
+            </a:r>
+          </a:p>
+          <a:p>
+            <a:pPr>
+              <a:spcAft>
+                <a:spcPts val="600"/>
+              </a:spcAft>
+            </a:pPr>
+            <a:r>
+              <a:rPr sz="1500">
+                <a:solidFill>
+                  <a:srgbClr val="22282E"/>
+                </a:solidFill>
+              </a:rPr>
+              <a:t>•  PowerView (PowerShell), NetExec (nxc), ldapsearch, BloodHound collectors (Clase 173).</a:t>
+            </a:r>
+          </a:p>
+          <a:p>
+            <a:pPr>
+              <a:spcAft>
+                <a:spcPts val="600"/>
+              </a:spcAft>
+            </a:pPr>
+            <a:r>
+              <a:rPr sz="1500">
+                <a:solidFill>
+                  <a:srgbClr val="22282E"/>
+                </a:solidFill>
+              </a:rPr>
+              <a:t>•  Impacket (GetADUsers.py, GetUserSPNs.py) desde Linux.</a:t>
+            </a:r>
+          </a:p>
+          <a:p>
+            <a:pPr>
+              <a:spcAft>
+                <a:spcPts val="600"/>
+              </a:spcAft>
+            </a:pPr>
+            <a:r>
+              <a:rPr sz="1500">
+                <a:solidFill>
+                  <a:srgbClr val="22282E"/>
+                </a:solidFill>
+              </a:rPr>
+              <a:t>•  Una cuenta de dominio de bajo privilegio para partir del foothold.</a:t>
             </a:r>
           </a:p>
         </p:txBody>
@@ -4718,7 +5109,7 @@
                   <a:srgbClr val="0B3D2E"/>
                 </a:solidFill>
               </a:rPr>
-              <a:t>📝 Reto verificable</a:t>
+              <a:t>🧪 Laboratorio guiado</a:t>
             </a:r>
           </a:p>
         </p:txBody>
@@ -4756,22 +5147,97 @@
                   <a:srgbClr val="22282E"/>
                 </a:solidFill>
               </a:rPr>
-              <a:t>•  Produce un mapa del dominio de tu AD lab: usuarios privilegiados, cuentas con SPN, GPOs relevantes, confianzas y al menos una relación ACL potencialmente abusable, recogido además con un collector de BloodHound.</a:t>
-            </a:r>
-          </a:p>
-          <a:p>
-            <a:pPr>
-              <a:spcAft>
-                <a:spcPts val="600"/>
-              </a:spcAft>
-            </a:pPr>
-            <a:r>
-              <a:rPr sz="1500">
-                <a:solidFill>
-                  <a:srgbClr val="22282E"/>
-                </a:solidFill>
-              </a:rPr>
-              <a:t>•  Criterio de aceptación: entregas un documento/diagrama con esos cinco elementos, cada dato verificable en el lab, y un archivo de recolección listo para importar en BloodHound.</a:t>
+              <a:t>•  Despliega el lab. Levanta GOAD o tu DC + workstations. Verifica resolución DNS al dominio (ej. lab.local).</a:t>
+            </a:r>
+          </a:p>
+          <a:p>
+            <a:pPr>
+              <a:spcAft>
+                <a:spcPts val="600"/>
+              </a:spcAft>
+            </a:pPr>
+            <a:r>
+              <a:rPr sz="1500">
+                <a:solidFill>
+                  <a:srgbClr val="22282E"/>
+                </a:solidFill>
+              </a:rPr>
+              <a:t>•  Enumera con nxc: nxc smb 10.10.10.10 -u user -p 'pass' --users --groups para listar usuarios y grupos.</a:t>
+            </a:r>
+          </a:p>
+          <a:p>
+            <a:pPr>
+              <a:spcAft>
+                <a:spcPts val="600"/>
+              </a:spcAft>
+            </a:pPr>
+            <a:r>
+              <a:rPr sz="1500">
+                <a:solidFill>
+                  <a:srgbClr val="22282E"/>
+                </a:solidFill>
+              </a:rPr>
+              <a:t>•  PowerView desde Windows. Importa el módulo y ejecuta Get-DomainUser, Get-DomainGroupMember "Domain Admins", Get-DomainComputer.</a:t>
+            </a:r>
+          </a:p>
+          <a:p>
+            <a:pPr>
+              <a:spcAft>
+                <a:spcPts val="600"/>
+              </a:spcAft>
+            </a:pPr>
+            <a:r>
+              <a:rPr sz="1500">
+                <a:solidFill>
+                  <a:srgbClr val="22282E"/>
+                </a:solidFill>
+              </a:rPr>
+              <a:t>•  Busca SPNs: con Impacket GetUserSPNs.py lab.local/user:pass -dc-ip 10.10.10.10 para localizar cuentas de servicio (insumo de la próxima clase).</a:t>
+            </a:r>
+          </a:p>
+          <a:p>
+            <a:pPr>
+              <a:spcAft>
+                <a:spcPts val="600"/>
+              </a:spcAft>
+            </a:pPr>
+            <a:r>
+              <a:rPr sz="1500">
+                <a:solidFill>
+                  <a:srgbClr val="22282E"/>
+                </a:solidFill>
+              </a:rPr>
+              <a:t>•  Consulta LDAP directa: ldapsearch -x -H ldap://10.10.10.10 -D 'user@lab.local' -w pass -b 'DC=lab,DC=local' '(objectClass=user)'.</a:t>
+            </a:r>
+          </a:p>
+          <a:p>
+            <a:pPr>
+              <a:spcAft>
+                <a:spcPts val="600"/>
+              </a:spcAft>
+            </a:pPr>
+            <a:r>
+              <a:rPr sz="1500">
+                <a:solidFill>
+                  <a:srgbClr val="22282E"/>
+                </a:solidFill>
+              </a:rPr>
+              <a:t>•  Mapea confianzas: Get-DomainTrust y anota relaciones entre dominios del forest.</a:t>
+            </a:r>
+          </a:p>
+          <a:p>
+            <a:pPr>
+              <a:spcAft>
+                <a:spcPts val="600"/>
+              </a:spcAft>
+            </a:pPr>
+            <a:r>
+              <a:rPr sz="1500">
+                <a:solidFill>
+                  <a:srgbClr val="22282E"/>
+                </a:solidFill>
+              </a:rPr>
+              <a:t>•  Recoge para BloodHound. Ejecuta el collector (SharpHound/bloodhound-python) para el análisis de rutas de la Clase 173, y documenta cuentas privilegiadas y ACLs interesantes.</a:t>
             </a:r>
           </a:p>
         </p:txBody>
